--- a/docs/playbook/story-excellence-mf-v1.pptx
+++ b/docs/playbook/story-excellence-mf-v1.pptx
@@ -2416,6 +2416,39 @@
               <a:t>with no open questions.</a:t>
             </a:r>
             <a:endParaRPr lang="en-US" sz="1100" dirty="0"/>
+          </a:p>
+        </p:txBody>
+      </p:sp>
+      <p:sp>
+        <p:nvSpPr>
+          <p:cNvPr id="21" name="TextBox 20"/>
+          <p:cNvSpPr txBox="1"/>
+          <p:nvPr/>
+        </p:nvSpPr>
+        <p:spPr>
+          <a:xfrm>
+            <a:off x="365760" y="137160"/>
+            <a:ext cx="8412480" cy="457200"/>
+          </a:xfrm>
+          <a:prstGeom prst="rect">
+            <a:avLst/>
+          </a:prstGeom>
+          <a:noFill/>
+        </p:spPr>
+        <p:txBody>
+          <a:bodyPr wrap="square">
+            <a:spAutoFit/>
+          </a:bodyPr>
+          <a:lstStyle/>
+          <a:p>
+            <a:r>
+              <a:rPr sz="900" b="1">
+                <a:solidFill>
+                  <a:srgbClr val="C26A1F"/>
+                </a:solidFill>
+              </a:rPr>
+              <a:t>⚠  Historical reference — superseded by Story Excellence Playbook v2 (docs/playbook/story-excellence-v2.docx). MF-specific criteria now live in the MF Servicing domain extension.</a:t>
+            </a:r>
           </a:p>
         </p:txBody>
       </p:sp>
